--- a/presentacion/Jenga_de_Cultura_General.pptx
+++ b/presentacion/Jenga_de_Cultura_General.pptx
@@ -6069,7 +6069,7 @@
                 <a:ea typeface="Calibri" pitchFamily="34" charset="-122"/>
                 <a:cs typeface="Calibri" pitchFamily="34" charset="-120"/>
               </a:rPr>
-              <a:t>45 bloques (el STL se imprime 3 veces), la base de la torre y el porta-cartas. Todo sin soportes.</a:t>
+              <a:t>45 bloques (el STL se imprime 3 veces), la base de la torre y el porta-cartas, con su muesca para sacar las cartas. Todo sin soportes.</a:t>
             </a:r>
             <a:endParaRPr lang="en-US" sz="1400" dirty="0"/>
           </a:p>
